--- a/docs/ПРЕЗЕНТАЦИЯ_СЕРВИСА.pptx
+++ b/docs/ПРЕЗЕНТАЦИЯ_СЕРВИСА.pptx
@@ -120,21 +120,21 @@
   <p:extLst>
     <p:ext uri="{521415D9-36F7-43E2-AB2F-B90AF26B5E84}">
       <p14:sectionLst xmlns:p14="http://schemas.microsoft.com/office/powerpoint/2010/main">
-        <p14:section name="Сервис" id="{fd84996e-b33d-e515-d92e-006d6d57df0c}">
+        <p14:section name="Сервис" id="{7917e307-6790-e5a1-fbf1-9a06e4cb07b4}">
           <p14:sldIdLst>
             <p14:sldId id="256"/>
             <p14:sldId id="257"/>
             <p14:sldId id="258"/>
           </p14:sldIdLst>
         </p14:section>
-        <p14:section name="Как это работает" id="{3bca0271-a9d3-a402-88c6-e8a9fa714836}">
+        <p14:section name="Как это работает" id="{bb554356-065e-aab1-a8ac-deb29a618535}">
           <p14:sldIdLst>
             <p14:sldId id="259"/>
             <p14:sldId id="260"/>
             <p14:sldId id="261"/>
           </p14:sldIdLst>
         </p14:section>
-        <p14:section name="Насколько это работает" id="{c7c3b167-8cc3-a102-dee6-c6fd5401509e}">
+        <p14:section name="Насколько это работает" id="{3acb6e6e-6187-fd53-1441-73b77e934c32}">
           <p14:sldIdLst>
             <p14:sldId id="262"/>
             <p14:sldId id="263"/>
@@ -142,7 +142,7 @@
             <p14:sldId id="265"/>
           </p14:sldIdLst>
         </p14:section>
-        <p14:section name="Как расти" id="{d3f7d41b-b385-f39e-3e54-a2ba1cf69181}">
+        <p14:section name="Как расти" id="{56e77f75-c2bf-08b1-7c2a-f94166876122}">
           <p14:sldIdLst>
             <p14:sldId id="266"/>
             <p14:sldId id="267"/>
@@ -730,7 +730,7 @@
           <a:p>
             <a:r>
               <a:rPr lang="en-US" dirty="0"/>
-              <a:t>Узкое место при росте — художник: 97% времени цикла. Его масштабируют числом видеокарт и очередью, остальное — обычными копиями сервисов.</a:t>
+              <a:t>Узкое место при росте — диффузия: 97% времени цикла. Его масштабируют числом видеокарт и очередью, остальное — обычными копиями сервисов.</a:t>
             </a:r>
             <a:endParaRPr lang="en-US" dirty="0"/>
           </a:p>
@@ -1346,7 +1346,7 @@
           <a:p>
             <a:r>
               <a:rPr lang="en-US" dirty="0"/>
-              <a:t>Модули — отдельные сервисы, их можно менять и масштабировать независимо. Специалист по данным выделен: это самая обученная часть системы.</a:t>
+              <a:t>Сервисы независимы, их можно менять и масштабировать по отдельности. NL2SQL-агент выделен: это дообученная часть системы.</a:t>
             </a:r>
             <a:endParaRPr lang="en-US" dirty="0"/>
           </a:p>
@@ -1698,7 +1698,7 @@
           <a:p>
             <a:r>
               <a:rPr lang="en-US" dirty="0"/>
-              <a:t>Это ограничение железа, а не архитектуры: модули независимы и на сервере работают одновременно.</a:t>
+              <a:t>Это ограничение железа, а не архитектуры: сервисы независимы и на сервере работают одновременно.</a:t>
             </a:r>
             <a:endParaRPr lang="en-US" dirty="0"/>
           </a:p>
@@ -3592,7 +3592,7 @@
                   <a:srgbClr val="4B5563"/>
                 </a:solidFill>
               </a:rPr>
-              <a:t>модули по очереди</a:t>
+              <a:t>сервисы по очереди</a:t>
             </a:r>
             <a:endParaRPr lang="en-US" sz="1250" dirty="0"/>
           </a:p>
@@ -3790,7 +3790,7 @@
                   <a:srgbClr val="4B5563"/>
                 </a:solidFill>
               </a:rPr>
-              <a:t>одна видеокарта 80 ГБ под языковые модели + одна 24–48 ГБ под художника</a:t>
+              <a:t>одна видеокарта 80 ГБ под LLM (vLLM) + одна 24–48 ГБ под FLUX</a:t>
             </a:r>
             <a:endParaRPr lang="en-US" sz="1150" dirty="0"/>
           </a:p>
@@ -3830,7 +3830,7 @@
                   <a:srgbClr val="4B5563"/>
                 </a:solidFill>
               </a:rPr>
-              <a:t>все модули работают одновременно</a:t>
+              <a:t>все сервисы работают одновременно</a:t>
             </a:r>
             <a:endParaRPr lang="en-US" sz="1250" dirty="0"/>
           </a:p>
@@ -4086,7 +4086,7 @@
                   <a:srgbClr val="4B5563"/>
                 </a:solidFill>
               </a:rPr>
-              <a:t>диспетчер и чертёжник — в нескольких копиях</a:t>
+              <a:t>оркестратор и code_executor — в нескольких копиях</a:t>
             </a:r>
             <a:endParaRPr lang="en-US" sz="1250" dirty="0"/>
           </a:p>
@@ -4104,7 +4104,7 @@
                   <a:srgbClr val="4B5563"/>
                 </a:solidFill>
               </a:rPr>
-              <a:t>художник — через очередь, видеокарты добавляются по её длине</a:t>
+              <a:t>диффузия — через очередь, видеокарты добавляются по её длине</a:t>
             </a:r>
             <a:endParaRPr lang="en-US" sz="1250" dirty="0"/>
           </a:p>
@@ -4140,7 +4140,7 @@
                   <a:srgbClr val="4B5563"/>
                 </a:solidFill>
               </a:rPr>
-              <a:t>оценка качества — в фоне, не задерживая ответ</a:t>
+              <a:t>LLM-судья — в фоне, не задерживая ответ</a:t>
             </a:r>
             <a:endParaRPr lang="en-US" sz="1250" dirty="0"/>
           </a:p>
@@ -4176,7 +4176,7 @@
                   <a:srgbClr val="8A94A6"/>
                 </a:solidFill>
               </a:rPr>
-              <a:t>Каждый модуль — отдельный контейнер, художник уже работал на сервере с видеокартой. Цифры в скобках появятся после первого запуска на сервере.</a:t>
+              <a:t>Каждый сервис — отдельный контейнер; диффузия уже работала на сервере с видеокартой. Цифры в скобках появятся после первого запуска на сервере.</a:t>
             </a:r>
             <a:endParaRPr lang="en-US" sz="1050" dirty="0"/>
           </a:p>
@@ -4887,7 +4887,7 @@
                             <a:srgbClr val="1F2A37"/>
                           </a:solidFill>
                         </a:rPr>
-                        <a:t>Художник искажает пропорции при сложных правках</a:t>
+                        <a:t>Диффузионная модель искажает пропорции при сложных правках</a:t>
                       </a:r>
                       <a:endParaRPr lang="en-US" sz="1200" dirty="0"/>
                     </a:p>
@@ -5072,7 +5072,7 @@
                             <a:srgbClr val="1F2A37"/>
                           </a:solidFill>
                         </a:rPr>
-                        <a:t>Автоматический контролёр завышает оценку</a:t>
+                        <a:t>LLM-судья завышает оценку</a:t>
                       </a:r>
                       <a:endParaRPr lang="en-US" sz="1200" dirty="0"/>
                     </a:p>
@@ -6406,7 +6406,7 @@
                   <a:srgbClr val="8A94A6"/>
                 </a:solidFill>
               </a:rPr>
-              <a:t>Установка — по инструкции из репозитория, скриптом; модели для специалиста по данным лежат там же.</a:t>
+              <a:t>Установка — по инструкции из репозитория, скриптом; LoRA-адаптеры NL2SQL-агента лежат там же.</a:t>
             </a:r>
             <a:endParaRPr lang="en-US" sz="1200" dirty="0"/>
           </a:p>
@@ -9353,7 +9353,7 @@
                   <a:srgbClr val="4B5563"/>
                 </a:solidFill>
               </a:rPr>
-              <a:t>По желанию — художественная переработка картинки нейросетью (стиль компании, иллюстрация для отчёта). Автоматическая проверка следит, чтобы цифры не поплыли.</a:t>
+              <a:t>По желанию — правка картинки диффузионной моделью (фирменный стиль, иллюстрация для отчёта). LLM-судья проверяет, что данные на графике не пострадали.</a:t>
             </a:r>
             <a:endParaRPr lang="en-US" sz="1250" dirty="0"/>
           </a:p>
@@ -9560,7 +9560,7 @@
                   <a:schemeClr val="tx1"/>
                 </a:solidFill>
               </a:rPr>
-              <a:t>Внутри — семь модулей, у каждого одна обязанность</a:t>
+              <a:t>Внутри — семь сервисов, у каждого одна обязанность</a:t>
             </a:r>
             <a:endParaRPr lang="en-US" sz="3000" dirty="0"/>
           </a:p>
@@ -9623,7 +9623,7 @@
                   <a:srgbClr val="1F2A37"/>
                 </a:solidFill>
               </a:rPr>
-              <a:t>Диспетчер</a:t>
+              <a:t>Оркестратор (chart_agent)</a:t>
             </a:r>
             <a:endParaRPr lang="en-US" sz="1500" dirty="0"/>
           </a:p>
@@ -9662,7 +9662,7 @@
                   <a:srgbClr val="4B5563"/>
                 </a:solidFill>
               </a:rPr>
-              <a:t>Ведёт диалог, помнит контекст, решает, кому передать вопрос и когда спросить человека.</a:t>
+              <a:t>Граф состояний на LangGraph: ведёт диалог, маршрутизирует намерение, останавливается на подтверждении человеком.</a:t>
             </a:r>
             <a:endParaRPr lang="en-US" sz="1250" dirty="0"/>
           </a:p>
@@ -9725,7 +9725,7 @@
                   <a:srgbClr val="1F2A37"/>
                 </a:solidFill>
               </a:rPr>
-              <a:t>Специалист по данным</a:t>
+              <a:t>NL2SQL-агент (sql_agent)</a:t>
             </a:r>
             <a:endParaRPr lang="en-US" sz="1500" dirty="0"/>
           </a:p>
@@ -9764,7 +9764,7 @@
                   <a:srgbClr val="4B5563"/>
                 </a:solidFill>
               </a:rPr>
-              <a:t>Три роли: находит таблицы, пишет запрос, проверяет его исполнением. Обучен на тысячах пар «вопрос — запрос».</a:t>
+              <a:t>Три роли с LoRA-адаптерами: schema-агент выбирает таблицы, SQL-агент пишет запрос, критик выполняет его и проверяет результат.</a:t>
             </a:r>
             <a:endParaRPr lang="en-US" sz="1250" dirty="0"/>
           </a:p>
@@ -9827,7 +9827,7 @@
                   <a:srgbClr val="1F2A37"/>
                 </a:solidFill>
               </a:rPr>
-              <a:t>Чертёжник</a:t>
+              <a:t>Исполнитель кода (code_executor)</a:t>
             </a:r>
             <a:endParaRPr lang="en-US" sz="1500" dirty="0"/>
           </a:p>
@@ -9866,7 +9866,7 @@
                   <a:srgbClr val="4B5563"/>
                 </a:solidFill>
               </a:rPr>
-              <a:t>Превращает таблицу в график кодом. Работает в изолированном процессе с ограничением по времени.</a:t>
+              <a:t>Выполняет сгенерированный pandas- и matplotlib-код в отдельном процессе с таймаутом и возвращает картинку.</a:t>
             </a:r>
             <a:endParaRPr lang="en-US" sz="1250" dirty="0"/>
           </a:p>
@@ -9929,7 +9929,7 @@
                   <a:srgbClr val="1F2A37"/>
                 </a:solidFill>
               </a:rPr>
-              <a:t>Художник</a:t>
+              <a:t>Диффузионная модель (diffusion_service)</a:t>
             </a:r>
             <a:endParaRPr lang="en-US" sz="1500" dirty="0"/>
           </a:p>
@@ -9968,7 +9968,7 @@
                   <a:srgbClr val="4B5563"/>
                 </a:solidFill>
               </a:rPr>
-              <a:t>Нейросеть для картинок: перекрашивает, меняет форму элементов, добавляет иллюстрацию по описанию.</a:t>
+              <a:t>FLUX.2 Klein 9B с дообученной LoRA: правит картинку графика по текстовому промпту.</a:t>
             </a:r>
             <a:endParaRPr lang="en-US" sz="1250" dirty="0"/>
           </a:p>
@@ -10031,7 +10031,7 @@
                   <a:srgbClr val="1F2A37"/>
                 </a:solidFill>
               </a:rPr>
-              <a:t>Контролёр качества</a:t>
+              <a:t>LLM-судья (Qwen2.5-VL)</a:t>
             </a:r>
             <a:endParaRPr lang="en-US" sz="1500" dirty="0"/>
           </a:p>
@@ -10070,7 +10070,7 @@
                   <a:srgbClr val="4B5563"/>
                 </a:solidFill>
               </a:rPr>
-              <a:t>Сравнивает картинку до и после правки по десяти признакам: что изменилось и не пострадали ли данные.</a:t>
+              <a:t>Сравнивает график до и после правки по 10 критериям: A1–A5 — правка выполнена, P1–P5 — данные сохранены.</a:t>
             </a:r>
             <a:endParaRPr lang="en-US" sz="1250" dirty="0"/>
           </a:p>
@@ -10133,7 +10133,7 @@
                   <a:srgbClr val="1F2A37"/>
                 </a:solidFill>
               </a:rPr>
-              <a:t>Охрана</a:t>
+              <a:t>Guardrails (GLiNER2)</a:t>
             </a:r>
             <a:endParaRPr lang="en-US" sz="1500" dirty="0"/>
           </a:p>
@@ -10172,7 +10172,7 @@
                   <a:srgbClr val="4B5563"/>
                 </a:solidFill>
               </a:rPr>
-              <a:t>Отсеивает недопустимые запросы и помогает быстро понять намерение без тяжёлой модели.</a:t>
+              <a:t>Фильтр безопасности на входе и быстрая классификация намерения без обращения к большой модели.</a:t>
             </a:r>
             <a:endParaRPr lang="en-US" sz="1250" dirty="0"/>
           </a:p>
@@ -10235,7 +10235,7 @@
                   <a:srgbClr val="1F2A37"/>
                 </a:solidFill>
               </a:rPr>
-              <a:t>Память</a:t>
+              <a:t>Хранилище состояния (Redis)</a:t>
             </a:r>
             <a:endParaRPr lang="en-US" sz="1500" dirty="0"/>
           </a:p>
@@ -10274,7 +10274,7 @@
                   <a:srgbClr val="4B5563"/>
                 </a:solidFill>
               </a:rPr>
-              <a:t>Хранит состояние каждого диалога, чтобы правки применялись к нужному графику и переживали перезапуск.</a:t>
+              <a:t>Состояние каждой сессии: правки применяются к нужному графику и переживают перезапуск сервиса.</a:t>
             </a:r>
             <a:endParaRPr lang="en-US" sz="1250" dirty="0"/>
           </a:p>
@@ -10667,7 +10667,7 @@
                   <a:srgbClr val="4B5563"/>
                 </a:solidFill>
               </a:rPr>
-              <a:t>Это правка картинки нейросетью, а не перерисовка кодом: подписи, значения и пропорции столбцов сохранены. Такие правки нужны, когда график идёт в отчёт или презентацию в фирменных цветах.</a:t>
+              <a:t>Это правка картинки диффузионной моделью FLUX, а не перерисовка кодом: подписи, значения и пропорции столбцов сохранены. Такие правки нужны, когда график идёт в отчёт или презентацию в фирменных цветах.</a:t>
             </a:r>
             <a:endParaRPr lang="en-US" sz="1300" dirty="0"/>
           </a:p>
@@ -11531,7 +11531,7 @@
                   <a:schemeClr val="tx1"/>
                 </a:solidFill>
               </a:rPr>
-              <a:t>Художник справляется с цветом и формой, но реализм портит данные</a:t>
+              <a:t>Диффузионная правка справляется с цветом и формой, но реализм портит данные</a:t>
             </a:r>
             <a:endParaRPr lang="en-US" sz="3000" dirty="0"/>
           </a:p>
@@ -11567,7 +11567,7 @@
                   <a:srgbClr val="4B5563"/>
                 </a:solidFill>
               </a:rPr>
-              <a:t>82 правки на тех же графиках, три уровня сложности. Оценка — автоматический контролёр по десяти признакам; правка засчитана, если выполнена и данные не искажены.</a:t>
+              <a:t>82 правки на тех же графиках, три уровня сложности. Оценка — LLM-судья по 10 критериям; правка засчитана (AP), если выполнена и данные не искажены.</a:t>
             </a:r>
             <a:endParaRPr lang="en-US" sz="1350" dirty="0"/>
           </a:p>
@@ -12583,7 +12583,7 @@
                   <a:srgbClr val="4B5563"/>
                 </a:solidFill>
               </a:rPr>
-              <a:t>«Столбцы в форме яиц»: все четыре значения, кроме первого, равны 1, а яйца разной высоты. Контролёр этого не заметил.</a:t>
+              <a:t>«Столбцы в форме яиц»: все четыре значения, кроме первого, равны 1, а яйца разной высоты. LLM-судья этого не заметил.</a:t>
             </a:r>
             <a:endParaRPr lang="en-US" sz="1150" dirty="0"/>
           </a:p>
@@ -12646,7 +12646,7 @@
                   <a:srgbClr val="C9D3DF"/>
                 </a:solidFill>
               </a:rPr>
-              <a:t>Вывод для внедрения: цветовые и простые правки можно отдавать автомату, сложные — только с просмотром человеком. Контролёр склонен завышать оценку, это известное свойство таких моделей.</a:t>
+              <a:t>Вывод для внедрения: цветовые и простые правки можно отдавать автомату, сложные — только с просмотром человеком. LLM-судья завышает оценку: согласие с экспертами κ ≈ 0.6.</a:t>
             </a:r>
             <a:endParaRPr lang="en-US" sz="1250" dirty="0"/>
           </a:p>
@@ -12856,7 +12856,7 @@
                   <a:srgbClr val="4B5563"/>
                 </a:solidFill>
               </a:rPr>
-              <a:t>от вопроса до графика с запросом под ним</a:t>
+              <a:t>от вопроса до графика с SQL-запросом под ним</a:t>
             </a:r>
             <a:endParaRPr lang="en-US" sz="1300" dirty="0"/>
           </a:p>
@@ -12958,7 +12958,7 @@
                   <a:srgbClr val="4B5563"/>
                 </a:solidFill>
               </a:rPr>
-              <a:t>художественная правка одной картинки</a:t>
+              <a:t>правка картинки диффузионной моделью</a:t>
             </a:r>
             <a:endParaRPr lang="en-US" sz="1300" dirty="0"/>
           </a:p>
@@ -13293,7 +13293,7 @@
                             <a:srgbClr val="1F2A37"/>
                           </a:solidFill>
                         </a:rPr>
-                        <a:t>Специалист по данным, три роли</a:t>
+                        <a:t>NL2SQL-агент, три LoRA-роли (Qwen2.5-Coder-14B)</a:t>
                       </a:r>
                       <a:endParaRPr lang="en-US" sz="1300" dirty="0"/>
                     </a:p>
@@ -13478,7 +13478,7 @@
                             <a:srgbClr val="1F2A37"/>
                           </a:solidFill>
                         </a:rPr>
-                        <a:t>Диспетчер и чертёжник (языковая модель)</a:t>
+                        <a:t>Оркестратор: модель qwen2.5-coder:14b</a:t>
                       </a:r>
                       <a:endParaRPr lang="en-US" sz="1300" dirty="0"/>
                     </a:p>
@@ -13663,7 +13663,7 @@
                             <a:srgbClr val="1F2A37"/>
                           </a:solidFill>
                         </a:rPr>
-                        <a:t>Художник (модель для картинок)</a:t>
+                        <a:t>Диффузионная модель FLUX.2 Klein 9B</a:t>
                       </a:r>
                       <a:endParaRPr lang="en-US" sz="1300" dirty="0"/>
                     </a:p>
@@ -13785,7 +13785,7 @@
                             <a:srgbClr val="1F2A37"/>
                           </a:solidFill>
                         </a:rPr>
-                        <a:t>только для художественных правок</a:t>
+                        <a:t>только для правок картинок</a:t>
                       </a:r>
                       <a:endParaRPr lang="en-US" sz="1300" dirty="0"/>
                     </a:p>
@@ -13848,7 +13848,7 @@
                             <a:srgbClr val="1F2A37"/>
                           </a:solidFill>
                         </a:rPr>
-                        <a:t>Контролёр качества</a:t>
+                        <a:t>LLM-судья Qwen2.5-VL-7B</a:t>
                       </a:r>
                       <a:endParaRPr lang="en-US" sz="1300" dirty="0"/>
                     </a:p>
@@ -14052,7 +14052,7 @@
                   <a:srgbClr val="4B5563"/>
                 </a:solidFill>
               </a:rPr>
-              <a:t>Всего 75 ГБ при 51,5 ГБ на рабочей машине, поэтому модули включаются по очереди. Для демонстрации без художника хватает 36 ГБ.</a:t>
+              <a:t>Всего 75 ГБ при 51,5 ГБ на рабочей машине, поэтому сервисы включаются по очереди. Для демонстрации без диффузии хватает 36 ГБ.</a:t>
             </a:r>
             <a:endParaRPr lang="en-US" sz="1250" dirty="0"/>
           </a:p>

--- a/docs/ПРЕЗЕНТАЦИЯ_СЕРВИСА.pptx
+++ b/docs/ПРЕЗЕНТАЦИЯ_СЕРВИСА.pptx
@@ -120,21 +120,21 @@
   <p:extLst>
     <p:ext uri="{521415D9-36F7-43E2-AB2F-B90AF26B5E84}">
       <p14:sectionLst xmlns:p14="http://schemas.microsoft.com/office/powerpoint/2010/main">
-        <p14:section name="Сервис" id="{7917e307-6790-e5a1-fbf1-9a06e4cb07b4}">
+        <p14:section name="Сервис" id="{bda9e1a7-e65b-54ee-d599-6524af385fd7}">
           <p14:sldIdLst>
             <p14:sldId id="256"/>
             <p14:sldId id="257"/>
             <p14:sldId id="258"/>
           </p14:sldIdLst>
         </p14:section>
-        <p14:section name="Как это работает" id="{bb554356-065e-aab1-a8ac-deb29a618535}">
+        <p14:section name="Как это работает" id="{9ac671f9-3eb0-bc51-3485-6508097a73f2}">
           <p14:sldIdLst>
             <p14:sldId id="259"/>
             <p14:sldId id="260"/>
             <p14:sldId id="261"/>
           </p14:sldIdLst>
         </p14:section>
-        <p14:section name="Насколько это работает" id="{3acb6e6e-6187-fd53-1441-73b77e934c32}">
+        <p14:section name="Насколько это работает" id="{33d77e5f-0f29-c202-f582-e86b50270d1c}">
           <p14:sldIdLst>
             <p14:sldId id="262"/>
             <p14:sldId id="263"/>
@@ -142,7 +142,7 @@
             <p14:sldId id="265"/>
           </p14:sldIdLst>
         </p14:section>
-        <p14:section name="Как расти" id="{56e77f75-c2bf-08b1-7c2a-f94166876122}">
+        <p14:section name="Как расти" id="{54093613-ee98-6758-4645-027764f1143b}">
           <p14:sldIdLst>
             <p14:sldId id="266"/>
             <p14:sldId id="267"/>
@@ -1863,7 +1863,7 @@
                   <a:srgbClr val="8A94A6"/>
                 </a:solidFill>
               </a:rPr>
-              <a:t>NL2G</a:t>
+              <a:t>nl2g</a:t>
             </a:r>
             <a:endParaRPr lang="en-US" sz="1000" dirty="0"/>
           </a:p>
@@ -2015,7 +2015,7 @@
                   <a:srgbClr val="9FB3C8"/>
                 </a:solidFill>
               </a:rPr>
-              <a:t>NL2G</a:t>
+              <a:t>nl2g</a:t>
             </a:r>
             <a:endParaRPr lang="en-US" sz="1000" dirty="0"/>
           </a:p>
@@ -2473,12 +2473,12 @@
               <a:buNone/>
             </a:pPr>
             <a:r>
-              <a:rPr lang="en-US" sz="1600" b="1" spc="300" kern="0" dirty="0">
+              <a:rPr lang="en-US" sz="1600" b="1" dirty="0">
                 <a:solidFill>
                   <a:srgbClr val="9FB3C8"/>
                 </a:solidFill>
               </a:rPr>
-              <a:t>NL2G</a:t>
+              <a:t>nl2g</a:t>
             </a:r>
             <a:endParaRPr lang="en-US" sz="1600" dirty="0"/>
           </a:p>
@@ -3466,12 +3466,12 @@
               <a:buNone/>
             </a:pPr>
             <a:r>
-              <a:rPr lang="en-US" sz="1000" b="1" spc="200" kern="0" dirty="0">
+              <a:rPr lang="en-US" sz="1000" b="1" dirty="0">
                 <a:solidFill>
                   <a:srgbClr val="8A94A6"/>
                 </a:solidFill>
               </a:rPr>
-              <a:t>СЕЙЧАС</a:t>
+              <a:t>Сейчас</a:t>
             </a:r>
             <a:endParaRPr lang="en-US" sz="1000" dirty="0"/>
           </a:p>
@@ -3722,12 +3722,12 @@
               <a:buNone/>
             </a:pPr>
             <a:r>
-              <a:rPr lang="en-US" sz="1000" b="1" spc="200" kern="0" dirty="0">
+              <a:rPr lang="en-US" sz="1000" b="1" dirty="0">
                 <a:solidFill>
                   <a:srgbClr val="D98324"/>
                 </a:solidFill>
               </a:rPr>
-              <a:t>ШАГ 1</a:t>
+              <a:t>Шаг 1</a:t>
             </a:r>
             <a:endParaRPr lang="en-US" sz="1000" dirty="0"/>
           </a:p>
@@ -3978,12 +3978,12 @@
               <a:buNone/>
             </a:pPr>
             <a:r>
-              <a:rPr lang="en-US" sz="1000" b="1" spc="200" kern="0" dirty="0">
+              <a:rPr lang="en-US" sz="1000" b="1" dirty="0">
                 <a:solidFill>
                   <a:srgbClr val="1C7C7D"/>
                 </a:solidFill>
               </a:rPr>
-              <a:t>ШАГ 2</a:t>
+              <a:t>Шаг 2</a:t>
             </a:r>
             <a:endParaRPr lang="en-US" sz="1000" dirty="0"/>
           </a:p>
@@ -10515,12 +10515,12 @@
               <a:buNone/>
             </a:pPr>
             <a:r>
-              <a:rPr lang="en-US" sz="1100" b="1" spc="200" kern="0" dirty="0">
+              <a:rPr lang="en-US" sz="1100" b="1" dirty="0">
                 <a:solidFill>
                   <a:srgbClr val="8A94A6"/>
                 </a:solidFill>
               </a:rPr>
-              <a:t>ДО</a:t>
+              <a:t>До</a:t>
             </a:r>
             <a:endParaRPr lang="en-US" sz="1100" dirty="0"/>
           </a:p>
@@ -10551,12 +10551,12 @@
               <a:buNone/>
             </a:pPr>
             <a:r>
-              <a:rPr lang="en-US" sz="1100" b="1" spc="100" kern="0" dirty="0">
+              <a:rPr lang="en-US" sz="1100" b="1" dirty="0">
                 <a:solidFill>
                   <a:srgbClr val="8A94A6"/>
                 </a:solidFill>
               </a:rPr>
-              <a:t>ПОСЛЕ: «сделай столбцы ярко-красными, фон белый, оси чёрные»</a:t>
+              <a:t>После: «сделай столбцы ярко-красными, фон белый, оси чёрные»</a:t>
             </a:r>
             <a:endParaRPr lang="en-US" sz="1100" dirty="0"/>
           </a:p>
@@ -14112,9 +14112,9 @@
 </file>
 
 <file path=ppt/theme/theme1.xml><?xml version="1.0" encoding="utf-8"?>
-<a:theme xmlns:a="http://schemas.openxmlformats.org/drawingml/2006/main" name="NL2G pitch">
+<a:theme xmlns:a="http://schemas.openxmlformats.org/drawingml/2006/main" name="nl2g">
   <a:themeElements>
-    <a:clrScheme name="NL2G pitch">
+    <a:clrScheme name="nl2g">
       <a:dk1>
         <a:srgbClr val="1F2A37"/>
       </a:dk1>
@@ -14152,7 +14152,7 @@
         <a:srgbClr val="4B5563"/>
       </a:folHlink>
     </a:clrScheme>
-    <a:fontScheme name="NL2G pitch">
+    <a:fontScheme name="nl2g">
       <a:majorFont>
         <a:latin typeface="Cambria"/>
         <a:ea typeface=""/>

--- a/docs/ПРЕЗЕНТАЦИЯ_СЕРВИСА.pptx
+++ b/docs/ПРЕЗЕНТАЦИЯ_СЕРВИСА.pptx
@@ -119,7 +119,7 @@
   <p:extLst>
     <p:ext uri="{521415D9-36F7-43E2-AB2F-B90AF26B5E84}">
       <p14:sectionLst xmlns:p14="http://schemas.microsoft.com/office/powerpoint/2010/main">
-        <p14:section name="Система" id="{443c55ad-3cef-7b72-583b-0aa40233bbc7}">
+        <p14:section name="Система" id="{f7e6091b-4719-85ca-377d-d49d09d15474}">
           <p14:sldIdLst>
             <p14:sldId id="256"/>
             <p14:sldId id="257"/>
@@ -127,26 +127,26 @@
             <p14:sldId id="259"/>
           </p14:sldIdLst>
         </p14:section>
-        <p14:section name="Примеры" id="{24222474-fc69-da8b-34cb-571d99c8dc32}">
+        <p14:section name="Примеры" id="{80a0adc0-f5c8-ef72-c94a-3fd135531db2}">
           <p14:sldIdLst>
             <p14:sldId id="260"/>
             <p14:sldId id="261"/>
           </p14:sldIdLst>
         </p14:section>
-        <p14:section name="Оценка" id="{53aca435-a91d-9b58-14bb-2ce93352218a}">
+        <p14:section name="Оценка" id="{72d5a077-f403-d610-443c-2c7d4247a578}">
           <p14:sldIdLst>
             <p14:sldId id="262"/>
             <p14:sldId id="263"/>
             <p14:sldId id="264"/>
           </p14:sldIdLst>
         </p14:section>
-        <p14:section name="Ресурсы" id="{12e53b68-ef97-5a3c-ba9d-68d732aa6136}">
+        <p14:section name="Ресурсы" id="{36ffce53-9988-7347-aa7b-249874dbc50d}">
           <p14:sldIdLst>
             <p14:sldId id="265"/>
             <p14:sldId id="266"/>
           </p14:sldIdLst>
         </p14:section>
-        <p14:section name="Ограничения" id="{d20e8351-5898-5800-543e-34f7025a28b5}">
+        <p14:section name="Ограничения" id="{ebb314cd-843f-32e8-d421-6f71ad2b39ab}">
           <p14:sldIdLst>
             <p14:sldId id="267"/>
             <p14:sldId id="268"/>
@@ -14900,7 +14900,7 @@
                             <a:srgbClr val="1F2A37"/>
                           </a:solidFill>
                         </a:rPr>
-                        <a:t>Срез</a:t>
+                        <a:t>Группа правок</a:t>
                       </a:r>
                       <a:endParaRPr lang="en-US" sz="1250" dirty="0"/>
                     </a:p>
@@ -17239,6 +17239,124 @@
               <a:t>Яйца разной высоты при равных значениях получили P3 «пропорции сохранены». Согласие судьи с экспертами κ ≈ 0.6, поэтому AP — верхняя оценка; нужна выборочная ручная разметка.</a:t>
             </a:r>
             <a:endParaRPr lang="en-US" sz="1200" dirty="0"/>
+          </a:p>
+        </p:txBody>
+      </p:sp>
+      <p:sp>
+        <p:nvSpPr>
+          <p:cNvPr id="11" name="Shape 8"/>
+          <p:cNvSpPr/>
+          <p:nvPr/>
+        </p:nvSpPr>
+        <p:spPr>
+          <a:xfrm>
+            <a:off x="548640" y="4892040"/>
+            <a:ext cx="6400800" cy="1188720"/>
+          </a:xfrm>
+          <a:prstGeom prst="roundRect">
+            <a:avLst>
+              <a:gd name="adj" fmla="val 7692"/>
+            </a:avLst>
+          </a:prstGeom>
+          <a:solidFill>
+            <a:srgbClr val="F1F3F6"/>
+          </a:solidFill>
+          <a:ln w="12700">
+            <a:solidFill>
+              <a:srgbClr val="F1F3F6"/>
+            </a:solidFill>
+            <a:prstDash val="solid"/>
+          </a:ln>
+        </p:spPr>
+      </p:sp>
+      <p:sp>
+        <p:nvSpPr>
+          <p:cNvPr id="12" name="Text 9"/>
+          <p:cNvSpPr txBox="1"/>
+          <p:nvPr/>
+        </p:nvSpPr>
+        <p:spPr>
+          <a:xfrm>
+            <a:off x="731520" y="4937760"/>
+            <a:ext cx="6035040" cy="1097280"/>
+          </a:xfrm>
+          <a:prstGeom prst="rect">
+            <a:avLst/>
+          </a:prstGeom>
+          <a:noFill/>
+          <a:ln/>
+        </p:spPr>
+        <p:txBody>
+          <a:bodyPr wrap="square" lIns="0" tIns="0" rIns="0" bIns="0" rtlCol="0" anchor="t"/>
+          <a:lstStyle/>
+          <a:p>
+            <a:pPr indent="0" marL="0">
+              <a:buNone/>
+            </a:pPr>
+            <a:r>
+              <a:rPr lang="en-US" sz="1050" b="1" dirty="0">
+                <a:solidFill>
+                  <a:srgbClr val="4B5563"/>
+                </a:solidFill>
+              </a:rPr>
+              <a:t>A</a:t>
+            </a:r>
+            <a:pPr indent="0" marL="0">
+              <a:buNone/>
+            </a:pPr>
+            <a:r>
+              <a:rPr lang="en-US" sz="1050" dirty="0">
+                <a:solidFill>
+                  <a:srgbClr val="4B5563"/>
+                </a:solidFill>
+              </a:rPr>
+              <a:t> — правка выполнена: пройдены все критерии A1–A5 (изменение видно, затронуты нужные элементы, сделано полностью, без лишних изменений, картинка целостна). </a:t>
+            </a:r>
+            <a:pPr indent="0" marL="0">
+              <a:buNone/>
+            </a:pPr>
+            <a:r>
+              <a:rPr lang="en-US" sz="1050" b="1" dirty="0">
+                <a:solidFill>
+                  <a:srgbClr val="4B5563"/>
+                </a:solidFill>
+              </a:rPr>
+              <a:t>P</a:t>
+            </a:r>
+            <a:pPr indent="0" marL="0">
+              <a:buNone/>
+            </a:pPr>
+            <a:r>
+              <a:rPr lang="en-US" sz="1050" dirty="0">
+                <a:solidFill>
+                  <a:srgbClr val="4B5563"/>
+                </a:solidFill>
+              </a:rPr>
+              <a:t> — данные сохранены: пройдены все критерии P1–P5 (состав элементов, расположение, масштабы и пропорции, визуальное кодирование, нет артефактов). </a:t>
+            </a:r>
+            <a:pPr indent="0" marL="0">
+              <a:buNone/>
+            </a:pPr>
+            <a:r>
+              <a:rPr lang="en-US" sz="1050" b="1" dirty="0">
+                <a:solidFill>
+                  <a:srgbClr val="4B5563"/>
+                </a:solidFill>
+              </a:rPr>
+              <a:t>AP</a:t>
+            </a:r>
+            <a:pPr indent="0" marL="0">
+              <a:buNone/>
+            </a:pPr>
+            <a:r>
+              <a:rPr lang="en-US" sz="1050" dirty="0">
+                <a:solidFill>
+                  <a:srgbClr val="4B5563"/>
+                </a:solidFill>
+              </a:rPr>
+              <a:t> — и то и другое одновременно; основная метрика. Группа — уровень сложности промпта или наличие «яйца» в нём; «правок» — сколько оценено.</a:t>
+            </a:r>
+            <a:endParaRPr lang="en-US" sz="1050" dirty="0"/>
           </a:p>
         </p:txBody>
       </p:sp>
